--- a/presentation/RAG-Four-Ways.pptx
+++ b/presentation/RAG-Four-Ways.pptx
@@ -958,7 +958,7 @@
           <a:p>
             <a:r>
               <a:rPr lang="en-US" dirty="0"/>
-              <a:t>The star of the talk. Keep the four beats tight and always return to slide 10 between them so the audience tracks where you are. Pacing: step 1 and 2 back to back is the money shot — wrong answer, then right answer, same question. Let the contrast breathe. Step 3 is the ergonomics reveal; step 4 is the 'RAG needs tuning' reveal. Practical: set OPENAI_API_KEY beforehand, have the dev server already warm, and have the backup recording one Alt-Tab away. The self-deprecating 'panic window' line both gets a laugh and quietly sets expectations if the Wi-Fi betrays you. Known gotcha on the demo machine: a local Netty loopback/VPN issue and the easy-rag Docker dev-card can block startup — start the server before the session, don't cold-start it on stage.</a:t>
+              <a:t>The star of the talk. Keep the four beats tight and always return to slide 10 between them so the audience tracks where you are. Pacing: step 1 and 2 back to back is the money shot — wrong answer, then right answer, same question. Let the contrast breathe. Step 3 is the ergonomics reveal; step 4 is the 'RAG needs tuning' reveal. Practical: set OPENAI_API_KEY beforehand, have the dev server already warm, and have the backup recording one Alt-Tab away. The self-deprecating 'panic window' line both gets a laugh and quietly sets expectations if the Wi-Fi betrays you. Offline fallback (and a nice flex): you can run the whole demo with no internet using local Ollama — start with -Dquarkus.profile=ollama and it uses llama3.2:3b + nomic-embed-text on this laptop. Pre-warm the models (keep_alive:30m) so the first answer isn't slow, and keep answers short since local generation is ~7 tokens/sec. If you do the Ollama run live, it doubles as the slide-16 on-prem proof. Known gotcha on the demo machine: a local Netty loopback/VPN issue and the easy-rag Docker dev-card can block startup — start the server before the session, don't cold-start it on stage.</a:t>
             </a:r>
             <a:endParaRPr lang="en-US" dirty="0"/>
           </a:p>
@@ -1134,7 +1134,7 @@
           <a:p>
             <a:r>
               <a:rPr lang="en-US" dirty="0"/>
-              <a:t>De-risk the obvious objection: 'sure, it demos, but productionizing AI is a project.' Here it isn't — each row is a swap, not a redesign. Hit the two that matter most to this audience: pgvector means the vector store is just Postgres (a database they already run and back up), and Ollama means the whole thing can run on-prem with no data leaving the building — the answer to every security and compliance question. Cost shape: the LLM API is the variable cost and it scales with usage; the infrastructure footprint stays flat. Close on 'your DevOps team keeps their runbook' — that's the sentence that gets this into production.</a:t>
+              <a:t>De-risk the obvious objection: 'sure, it demos, but productionizing AI is a project.' Here it isn't — each row is a swap, not a redesign. Hit the two that matter most to this audience: pgvector means the vector store is just Postgres (a database they already run and back up), and Ollama means the whole thing can run on-prem with no data leaving the building — the answer to every security and compliance question. Make the Ollama row concrete: llama3.2:3b for chat and nomic-embed-text for embeddings run fully local — I benchmarked them on this very laptop, CPU-only, and they're fluent for a live demo. And because the provider is a config property, switching from OpenAI to local Ollama is literally the `-Dquarkus.profile=ollama` flag, not a code change. If the Wi-Fi or the OpenAI key fails on stage, that same flag is also your offline fallback. Cost shape: the hosted LLM API is the variable cost and it scales with usage; with on-prem Ollama even that becomes fixed hardware. The infrastructure footprint stays flat. Close on 'your DevOps team keeps their runbook' — that's the sentence that gets this into production.</a:t>
             </a:r>
             <a:endParaRPr lang="en-US" dirty="0"/>
           </a:p>
@@ -9283,7 +9283,7 @@
                           <a:ea typeface="Calibri" pitchFamily="34" charset="-122"/>
                           <a:cs typeface="Calibri" pitchFamily="34" charset="-120"/>
                         </a:rPr>
-                        <a:t>LLM provider</a:t>
+                        <a:t>Models (chat + embed)</a:t>
                       </a:r>
                       <a:endParaRPr lang="en-US" sz="1300" dirty="0">
                         <a:latin typeface="Calibri" charset="0"/>
@@ -9351,7 +9351,7 @@
                           <a:ea typeface="Calibri" pitchFamily="34" charset="-122"/>
                           <a:cs typeface="Calibri" pitchFamily="34" charset="-120"/>
                         </a:rPr>
-                        <a:t>OpenAI gpt-4o-mini</a:t>
+                        <a:t>OpenAI gpt-4o-mini + text-embedding-3-small</a:t>
                       </a:r>
                       <a:endParaRPr lang="en-US" sz="1300" dirty="0">
                         <a:latin typeface="Calibri" charset="0"/>
@@ -9419,7 +9419,7 @@
                           <a:ea typeface="Calibri" pitchFamily="34" charset="-122"/>
                           <a:cs typeface="Calibri" pitchFamily="34" charset="-120"/>
                         </a:rPr>
-                        <a:t>Azure OpenAI · or self-hosted Ollama, fully on-prem</a:t>
+                        <a:t>On-prem Ollama: llama3.2:3b + nomic-embed-text (or Azure OpenAI)</a:t>
                       </a:r>
                       <a:endParaRPr lang="en-US" sz="1300" dirty="0">
                         <a:latin typeface="Calibri" charset="0"/>

--- a/presentation/RAG-Four-Ways.pptx
+++ b/presentation/RAG-Four-Ways.pptx
@@ -22,9 +22,11 @@
     <p:sldId id="270" r:id="rId16"/>
     <p:sldId id="271" r:id="rId17"/>
     <p:sldId id="272" r:id="rId18"/>
+    <p:sldId id="273" r:id="rId19"/>
+    <p:sldId id="274" r:id="rId20"/>
   </p:sldIdLst>
   <p:notesMasterIdLst>
-    <p:notesMasterId r:id="rId19"/>
+    <p:notesMasterId r:id="rId21"/>
   </p:notesMasterIdLst>
   <p:sldSz cx="12191695" cy="6858000"/>
   <p:notesSz cx="6858000" cy="12191695"/>
@@ -1222,7 +1224,7 @@
           <a:p>
             <a:r>
               <a:rPr lang="en-US" dirty="0"/>
-              <a:t>Land the closing line cleanly and then stop talking — let it sit. 'If you can write a REST endpoint, you can build an AI feature. You've been overthinking it.' The four chips are the entire talk compressed: ground it with RAG, stay in Java, keep your APM, ship the JAR. If someone only remembers four words, these are the four. Then open Q&amp;A. Anticipated questions: data security (answer: Ollama on-prem, nothing leaves the building), cost (scales with tokens, infra flat), 'why not Python' (your data and your ops are already here), and 'is JVM mode really fine for prod' (yes — native is an option, not a requirement). Leave the resource links on screen during Q&amp;A.</a:t>
+              <a:t>First of two 'the AiService does more than RAG' slides. The whole feature is the @MemoryId parameter: pass a session id and quarkus-langchain4j keeps a separate conversation window per id, automatically, in memory. Demo live if you like (Bruno folder '5 - Memory'): POST /chat/memory twice with sessionId 'rolf' — tell it your name, then ask for it back; it remembers. Then POST with a different sessionId and it has no idea — proving the histories are isolated and it's the id doing the work, nothing else. Keep it deliberately RAG-free so the feature is the star; mention the default is a 10-message in-memory window you can swap for a persistent store in one line.</a:t>
             </a:r>
             <a:endParaRPr lang="en-US" dirty="0"/>
           </a:p>
@@ -1246,6 +1248,182 @@
             <a:fld id="{F7021451-1387-4CA6-816F-3879F97B5CBC}" type="slidenum">
               <a:rPr lang="en-US"/>
               <a:t>17</a:t>
+            </a:fld>
+            <a:endParaRPr lang="en-US"/>
+          </a:p>
+        </p:txBody>
+      </p:sp>
+    </p:spTree>
+    <p:extLst>
+      <p:ext uri="{BB962C8B-B14F-4D97-AF65-F5344CB8AC3E}">
+        <p14:creationId xmlns:p14="http://schemas.microsoft.com/office/powerpoint/2010/main" val="1024086991"/>
+      </p:ext>
+    </p:extLst>
+  </p:cSld>
+  <p:clrMapOvr>
+    <a:masterClrMapping/>
+  </p:clrMapOvr>
+</p:notes>
+</file>
+
+<file path=ppt/notesSlides/notesSlide18.xml><?xml version="1.0" encoding="utf-8"?>
+<p:notes xmlns:a="http://schemas.openxmlformats.org/drawingml/2006/main" xmlns:r="http://schemas.openxmlformats.org/officeDocument/2006/relationships" xmlns:p="http://schemas.openxmlformats.org/presentationml/2006/main">
+  <p:cSld>
+    <p:spTree>
+      <p:nvGrpSpPr>
+        <p:cNvPr id="1" name=""/>
+        <p:cNvGrpSpPr/>
+        <p:nvPr/>
+      </p:nvGrpSpPr>
+      <p:grpSpPr>
+        <a:xfrm>
+          <a:off x="0" y="0"/>
+          <a:ext cx="0" cy="0"/>
+          <a:chOff x="0" y="0"/>
+          <a:chExt cx="0" cy="0"/>
+        </a:xfrm>
+      </p:grpSpPr>
+      <p:sp>
+        <p:nvSpPr>
+          <p:cNvPr id="2" name="Slide Image Placeholder 1"/>
+          <p:cNvSpPr>
+            <a:spLocks noGrp="1" noRot="1" noChangeAspect="1"/>
+          </p:cNvSpPr>
+          <p:nvPr>
+            <p:ph type="sldImg"/>
+          </p:nvPr>
+        </p:nvSpPr>
+        <p:spPr/>
+      </p:sp>
+      <p:sp>
+        <p:nvSpPr>
+          <p:cNvPr id="3" name="Notes Placeholder 2"/>
+          <p:cNvSpPr>
+            <a:spLocks noGrp="1"/>
+          </p:cNvSpPr>
+          <p:nvPr>
+            <p:ph type="body" idx="1"/>
+          </p:nvPr>
+        </p:nvSpPr>
+        <p:spPr/>
+        <p:txBody>
+          <a:bodyPr/>
+          <a:lstStyle/>
+          <a:p>
+            <a:r>
+              <a:rPr lang="en-US" dirty="0"/>
+              <a:t>Second 'beyond RAG' slide and a reliable crowd-pleaser. The point: you declare a Java record as the return type and the model is forced to answer in that shape — quarkus-langchain4j inserts the JSON schema and deserializes the response into your POJO. No ObjectMapper, no regex to dig JSON out of prose. Demo (Bruno '6 - Structured output'): POST /games {"genre":"open-world RPG"} and show the typed JSON coming back. Great for building real features — function arguments, form-filling, data extraction. Honesty note for local models: gpt-4o-mini nails structured output; tiny Ollama models (llama3.2:3b) usually comply but can occasionally wobble on strict JSON — if demoing on Ollama, have OpenAI as the fallback for this one.</a:t>
+            </a:r>
+            <a:endParaRPr lang="en-US" dirty="0"/>
+          </a:p>
+        </p:txBody>
+      </p:sp>
+      <p:sp>
+        <p:nvSpPr>
+          <p:cNvPr id="4" name="Slide Number Placeholder 3"/>
+          <p:cNvSpPr>
+            <a:spLocks noGrp="1"/>
+          </p:cNvSpPr>
+          <p:nvPr>
+            <p:ph type="sldNum" sz="quarter" idx="10"/>
+          </p:nvPr>
+        </p:nvSpPr>
+        <p:spPr/>
+        <p:txBody>
+          <a:bodyPr/>
+          <a:lstStyle/>
+          <a:p>
+            <a:fld id="{F7021451-1387-4CA6-816F-3879F97B5CBC}" type="slidenum">
+              <a:rPr lang="en-US"/>
+              <a:t>18</a:t>
+            </a:fld>
+            <a:endParaRPr lang="en-US"/>
+          </a:p>
+        </p:txBody>
+      </p:sp>
+    </p:spTree>
+    <p:extLst>
+      <p:ext uri="{BB962C8B-B14F-4D97-AF65-F5344CB8AC3E}">
+        <p14:creationId xmlns:p14="http://schemas.microsoft.com/office/powerpoint/2010/main" val="1024086991"/>
+      </p:ext>
+    </p:extLst>
+  </p:cSld>
+  <p:clrMapOvr>
+    <a:masterClrMapping/>
+  </p:clrMapOvr>
+</p:notes>
+</file>
+
+<file path=ppt/notesSlides/notesSlide19.xml><?xml version="1.0" encoding="utf-8"?>
+<p:notes xmlns:a="http://schemas.openxmlformats.org/drawingml/2006/main" xmlns:r="http://schemas.openxmlformats.org/officeDocument/2006/relationships" xmlns:p="http://schemas.openxmlformats.org/presentationml/2006/main">
+  <p:cSld>
+    <p:spTree>
+      <p:nvGrpSpPr>
+        <p:cNvPr id="1" name=""/>
+        <p:cNvGrpSpPr/>
+        <p:nvPr/>
+      </p:nvGrpSpPr>
+      <p:grpSpPr>
+        <a:xfrm>
+          <a:off x="0" y="0"/>
+          <a:ext cx="0" cy="0"/>
+          <a:chOff x="0" y="0"/>
+          <a:chExt cx="0" cy="0"/>
+        </a:xfrm>
+      </p:grpSpPr>
+      <p:sp>
+        <p:nvSpPr>
+          <p:cNvPr id="2" name="Slide Image Placeholder 1"/>
+          <p:cNvSpPr>
+            <a:spLocks noGrp="1" noRot="1" noChangeAspect="1"/>
+          </p:cNvSpPr>
+          <p:nvPr>
+            <p:ph type="sldImg"/>
+          </p:nvPr>
+        </p:nvSpPr>
+        <p:spPr/>
+      </p:sp>
+      <p:sp>
+        <p:nvSpPr>
+          <p:cNvPr id="3" name="Notes Placeholder 2"/>
+          <p:cNvSpPr>
+            <a:spLocks noGrp="1"/>
+          </p:cNvSpPr>
+          <p:nvPr>
+            <p:ph type="body" idx="1"/>
+          </p:nvPr>
+        </p:nvSpPr>
+        <p:spPr/>
+        <p:txBody>
+          <a:bodyPr/>
+          <a:lstStyle/>
+          <a:p>
+            <a:r>
+              <a:rPr lang="en-US" dirty="0"/>
+              <a:t>Land the closing line cleanly and then stop talking — let it sit. 'If you can write a REST endpoint, you can build an AI feature. You've been overthinking it.' The four chips are the entire talk compressed: ground it with RAG, stay in Java, keep your APM, ship the JAR. If someone only remembers four words, these are the four. Then open Q&amp;A. Anticipated questions: data security (answer: Ollama on-prem, nothing leaves the building), cost (scales with tokens, infra flat), 'why not Python' (your data and your ops are already here), and 'is JVM mode really fine for prod' (yes — native is an option, not a requirement). Leave the resource links on screen during Q&amp;A.</a:t>
+            </a:r>
+            <a:endParaRPr lang="en-US" dirty="0"/>
+          </a:p>
+        </p:txBody>
+      </p:sp>
+      <p:sp>
+        <p:nvSpPr>
+          <p:cNvPr id="4" name="Slide Number Placeholder 3"/>
+          <p:cNvSpPr>
+            <a:spLocks noGrp="1"/>
+          </p:cNvSpPr>
+          <p:nvPr>
+            <p:ph type="sldNum" sz="quarter" idx="10"/>
+          </p:nvPr>
+        </p:nvSpPr>
+        <p:spPr/>
+        <p:txBody>
+          <a:bodyPr/>
+          <a:lstStyle/>
+          <a:p>
+            <a:fld id="{F7021451-1387-4CA6-816F-3879F97B5CBC}" type="slidenum">
+              <a:rPr lang="en-US"/>
+              <a:t>19</a:t>
             </a:fld>
             <a:endParaRPr lang="en-US"/>
           </a:p>
@@ -10278,6 +10456,2008 @@
         </p:nvSpPr>
         <p:spPr>
           <a:xfrm>
+            <a:off x="640080" y="475488"/>
+            <a:ext cx="4114800" cy="310896"/>
+          </a:xfrm>
+          <a:prstGeom prst="rect">
+            <a:avLst/>
+          </a:prstGeom>
+          <a:noFill/>
+          <a:ln/>
+        </p:spPr>
+        <p:txBody>
+          <a:bodyPr wrap="square" lIns="0" tIns="0" rIns="0" bIns="0" rtlCol="0" anchor="ctr"/>
+          <a:lstStyle/>
+          <a:p>
+            <a:pPr algn="l" indent="0" marL="0">
+              <a:buNone/>
+            </a:pPr>
+            <a:r>
+              <a:rPr lang="en-US" sz="1200" b="1" spc="200" kern="0" dirty="0">
+                <a:solidFill>
+                  <a:srgbClr val="34D399"/>
+                </a:solidFill>
+                <a:latin typeface="Courier New" pitchFamily="34" charset="0"/>
+                <a:ea typeface="Courier New" pitchFamily="34" charset="-122"/>
+                <a:cs typeface="Courier New" pitchFamily="34" charset="-120"/>
+              </a:rPr>
+              <a:t>// beyond rag · memory</a:t>
+            </a:r>
+            <a:endParaRPr lang="en-US" sz="1200" dirty="0"/>
+          </a:p>
+        </p:txBody>
+      </p:sp>
+      <p:sp>
+        <p:nvSpPr>
+          <p:cNvPr id="3" name="Text 1"/>
+          <p:cNvSpPr/>
+          <p:nvPr/>
+        </p:nvSpPr>
+        <p:spPr>
+          <a:xfrm>
+            <a:off x="640080" y="768096"/>
+            <a:ext cx="9631375" cy="868680"/>
+          </a:xfrm>
+          <a:prstGeom prst="rect">
+            <a:avLst/>
+          </a:prstGeom>
+          <a:noFill/>
+          <a:ln/>
+        </p:spPr>
+        <p:txBody>
+          <a:bodyPr wrap="square" lIns="0" tIns="0" rIns="0" bIns="0" rtlCol="0" anchor="t"/>
+          <a:lstStyle/>
+          <a:p>
+            <a:pPr algn="l" indent="0" marL="0">
+              <a:buNone/>
+            </a:pPr>
+            <a:r>
+              <a:rPr lang="en-US" sz="3200" b="1" dirty="0">
+                <a:solidFill>
+                  <a:srgbClr val="FFFFFF"/>
+                </a:solidFill>
+                <a:latin typeface="Arial" pitchFamily="34" charset="0"/>
+                <a:ea typeface="Arial" pitchFamily="34" charset="-122"/>
+                <a:cs typeface="Arial" pitchFamily="34" charset="-120"/>
+              </a:rPr>
+              <a:t>Memory: hand it a session id, it remembers</a:t>
+            </a:r>
+            <a:endParaRPr lang="en-US" sz="3200" dirty="0"/>
+          </a:p>
+        </p:txBody>
+      </p:sp>
+      <p:sp>
+        <p:nvSpPr>
+          <p:cNvPr id="4" name="Text 2"/>
+          <p:cNvSpPr/>
+          <p:nvPr/>
+        </p:nvSpPr>
+        <p:spPr>
+          <a:xfrm>
+            <a:off x="10454335" y="457200"/>
+            <a:ext cx="1097280" cy="822960"/>
+          </a:xfrm>
+          <a:prstGeom prst="rect">
+            <a:avLst/>
+          </a:prstGeom>
+          <a:noFill/>
+          <a:ln/>
+        </p:spPr>
+        <p:txBody>
+          <a:bodyPr wrap="square" lIns="0" tIns="0" rIns="0" bIns="0" rtlCol="0" anchor="t"/>
+          <a:lstStyle/>
+          <a:p>
+            <a:pPr algn="r" indent="0" marL="0">
+              <a:buNone/>
+            </a:pPr>
+            <a:r>
+              <a:rPr lang="en-US" sz="4000" b="1" dirty="0">
+                <a:solidFill>
+                  <a:srgbClr val="2B3A52"/>
+                </a:solidFill>
+                <a:latin typeface="Arial" pitchFamily="34" charset="0"/>
+                <a:ea typeface="Arial" pitchFamily="34" charset="-122"/>
+                <a:cs typeface="Arial" pitchFamily="34" charset="-120"/>
+              </a:rPr>
+              <a:t>17</a:t>
+            </a:r>
+            <a:endParaRPr lang="en-US" sz="4000" dirty="0"/>
+          </a:p>
+        </p:txBody>
+      </p:sp>
+      <p:sp>
+        <p:nvSpPr>
+          <p:cNvPr id="5" name="Text 3"/>
+          <p:cNvSpPr/>
+          <p:nvPr/>
+        </p:nvSpPr>
+        <p:spPr>
+          <a:xfrm>
+            <a:off x="640080" y="1591056"/>
+            <a:ext cx="10424160" cy="457200"/>
+          </a:xfrm>
+          <a:prstGeom prst="rect">
+            <a:avLst/>
+          </a:prstGeom>
+          <a:noFill/>
+          <a:ln/>
+        </p:spPr>
+        <p:txBody>
+          <a:bodyPr wrap="square" lIns="0" tIns="0" rIns="0" bIns="0" rtlCol="0" anchor="ctr"/>
+          <a:lstStyle/>
+          <a:p>
+            <a:pPr indent="0" marL="0">
+              <a:buNone/>
+            </a:pPr>
+            <a:r>
+              <a:rPr lang="en-US" sz="1500" i="1" dirty="0">
+                <a:solidFill>
+                  <a:srgbClr val="8294AE"/>
+                </a:solidFill>
+                <a:latin typeface="Calibri" pitchFamily="34" charset="0"/>
+                <a:ea typeface="Calibri" pitchFamily="34" charset="-122"/>
+                <a:cs typeface="Calibri" pitchFamily="34" charset="-120"/>
+              </a:rPr>
+              <a:t>Same AiService idea, no RAG — conversation history, keyed by an id you pass in.</a:t>
+            </a:r>
+            <a:endParaRPr lang="en-US" sz="1500" dirty="0"/>
+          </a:p>
+        </p:txBody>
+      </p:sp>
+      <p:sp>
+        <p:nvSpPr>
+          <p:cNvPr id="6" name="Shape 4"/>
+          <p:cNvSpPr/>
+          <p:nvPr/>
+        </p:nvSpPr>
+        <p:spPr>
+          <a:xfrm>
+            <a:off x="640080" y="2286000"/>
+            <a:ext cx="6400800" cy="3429000"/>
+          </a:xfrm>
+          <a:prstGeom prst="roundRect">
+            <a:avLst>
+              <a:gd name="adj" fmla="val 1600"/>
+            </a:avLst>
+          </a:prstGeom>
+          <a:solidFill>
+            <a:srgbClr val="0A111E"/>
+          </a:solidFill>
+          <a:ln w="12700">
+            <a:solidFill>
+              <a:srgbClr val="2B3A52"/>
+            </a:solidFill>
+            <a:prstDash val="solid"/>
+          </a:ln>
+          <a:effectLst>
+            <a:outerShdw sx="100000" sy="100000" kx="0" ky="0" algn="bl" rotWithShape="0" blurRad="114300" dist="38100" dir="5400000">
+              <a:srgbClr val="000000">
+                <a:alpha val="28000"/>
+              </a:srgbClr>
+            </a:outerShdw>
+          </a:effectLst>
+        </p:spPr>
+      </p:sp>
+      <p:sp>
+        <p:nvSpPr>
+          <p:cNvPr id="7" name="Shape 5"/>
+          <p:cNvSpPr/>
+          <p:nvPr/>
+        </p:nvSpPr>
+        <p:spPr>
+          <a:xfrm>
+            <a:off x="841248" y="2468880"/>
+            <a:ext cx="109728" cy="109728"/>
+          </a:xfrm>
+          <a:prstGeom prst="ellipse">
+            <a:avLst/>
+          </a:prstGeom>
+          <a:solidFill>
+            <a:srgbClr val="FF5F57"/>
+          </a:solidFill>
+          <a:ln/>
+        </p:spPr>
+      </p:sp>
+      <p:sp>
+        <p:nvSpPr>
+          <p:cNvPr id="8" name="Shape 6"/>
+          <p:cNvSpPr/>
+          <p:nvPr/>
+        </p:nvSpPr>
+        <p:spPr>
+          <a:xfrm>
+            <a:off x="1024128" y="2468880"/>
+            <a:ext cx="109728" cy="109728"/>
+          </a:xfrm>
+          <a:prstGeom prst="ellipse">
+            <a:avLst/>
+          </a:prstGeom>
+          <a:solidFill>
+            <a:srgbClr val="FEBC2E"/>
+          </a:solidFill>
+          <a:ln/>
+        </p:spPr>
+      </p:sp>
+      <p:sp>
+        <p:nvSpPr>
+          <p:cNvPr id="9" name="Shape 7"/>
+          <p:cNvSpPr/>
+          <p:nvPr/>
+        </p:nvSpPr>
+        <p:spPr>
+          <a:xfrm>
+            <a:off x="1207008" y="2468880"/>
+            <a:ext cx="109728" cy="109728"/>
+          </a:xfrm>
+          <a:prstGeom prst="ellipse">
+            <a:avLst/>
+          </a:prstGeom>
+          <a:solidFill>
+            <a:srgbClr val="28C840"/>
+          </a:solidFill>
+          <a:ln/>
+        </p:spPr>
+      </p:sp>
+      <p:sp>
+        <p:nvSpPr>
+          <p:cNvPr id="10" name="Text 8"/>
+          <p:cNvSpPr/>
+          <p:nvPr/>
+        </p:nvSpPr>
+        <p:spPr>
+          <a:xfrm>
+            <a:off x="1463040" y="2414016"/>
+            <a:ext cx="5394960" cy="237744"/>
+          </a:xfrm>
+          <a:prstGeom prst="rect">
+            <a:avLst/>
+          </a:prstGeom>
+          <a:noFill/>
+          <a:ln/>
+        </p:spPr>
+        <p:txBody>
+          <a:bodyPr wrap="square" lIns="0" tIns="0" rIns="0" bIns="0" rtlCol="0" anchor="ctr"/>
+          <a:lstStyle/>
+          <a:p>
+            <a:pPr algn="l" indent="0" marL="0">
+              <a:buNone/>
+            </a:pPr>
+            <a:r>
+              <a:rPr lang="en-US" sz="1050" dirty="0">
+                <a:solidFill>
+                  <a:srgbClr val="8294AE"/>
+                </a:solidFill>
+                <a:latin typeface="Courier New" pitchFamily="34" charset="0"/>
+                <a:ea typeface="Courier New" pitchFamily="34" charset="-122"/>
+                <a:cs typeface="Courier New" pitchFamily="34" charset="-120"/>
+              </a:rPr>
+              <a:t>ConversationalAssistant.java</a:t>
+            </a:r>
+            <a:endParaRPr lang="en-US" sz="1050" dirty="0"/>
+          </a:p>
+        </p:txBody>
+      </p:sp>
+      <p:sp>
+        <p:nvSpPr>
+          <p:cNvPr id="11" name="Text 9"/>
+          <p:cNvSpPr/>
+          <p:nvPr/>
+        </p:nvSpPr>
+        <p:spPr>
+          <a:xfrm>
+            <a:off x="896112" y="2743200"/>
+            <a:ext cx="5943600" cy="2788920"/>
+          </a:xfrm>
+          <a:prstGeom prst="rect">
+            <a:avLst/>
+          </a:prstGeom>
+          <a:noFill/>
+          <a:ln/>
+        </p:spPr>
+        <p:txBody>
+          <a:bodyPr wrap="square" lIns="0" tIns="0" rIns="0" bIns="0" rtlCol="0" anchor="t"/>
+          <a:lstStyle/>
+          <a:p>
+            <a:pPr algn="l" indent="0" marL="0">
+              <a:lnSpc>
+                <a:spcPct val="118000"/>
+              </a:lnSpc>
+              <a:buNone/>
+            </a:pPr>
+            <a:r>
+              <a:rPr lang="en-US" sz="1250" i="1" dirty="0">
+                <a:solidFill>
+                  <a:srgbClr val="8294AE"/>
+                </a:solidFill>
+                <a:latin typeface="Courier New" pitchFamily="34" charset="0"/>
+                <a:ea typeface="Courier New" pitchFamily="34" charset="-122"/>
+                <a:cs typeface="Courier New" pitchFamily="34" charset="-120"/>
+              </a:rPr>
+              <a:t>// no RAG — just an @MemoryId parameter</a:t>
+            </a:r>
+            <a:endParaRPr lang="en-US" sz="1250" dirty="0"/>
+          </a:p>
+          <a:p>
+            <a:pPr algn="l" indent="0" marL="0">
+              <a:lnSpc>
+                <a:spcPct val="118000"/>
+              </a:lnSpc>
+              <a:buNone/>
+            </a:pPr>
+            <a:r>
+              <a:rPr lang="en-US" sz="1250" dirty="0">
+                <a:solidFill>
+                  <a:srgbClr val="FBBF24"/>
+                </a:solidFill>
+                <a:latin typeface="Courier New" pitchFamily="34" charset="0"/>
+                <a:ea typeface="Courier New" pitchFamily="34" charset="-122"/>
+                <a:cs typeface="Courier New" pitchFamily="34" charset="-120"/>
+              </a:rPr>
+              <a:t>@RegisterAiService</a:t>
+            </a:r>
+            <a:endParaRPr lang="en-US" sz="1250" dirty="0"/>
+          </a:p>
+          <a:p>
+            <a:pPr algn="l" indent="0" marL="0">
+              <a:lnSpc>
+                <a:spcPct val="118000"/>
+              </a:lnSpc>
+              <a:buNone/>
+            </a:pPr>
+            <a:r>
+              <a:rPr lang="en-US" sz="1250" dirty="0">
+                <a:solidFill>
+                  <a:srgbClr val="CBD5E1"/>
+                </a:solidFill>
+                <a:latin typeface="Courier New" pitchFamily="34" charset="0"/>
+                <a:ea typeface="Courier New" pitchFamily="34" charset="-122"/>
+                <a:cs typeface="Courier New" pitchFamily="34" charset="-120"/>
+              </a:rPr>
+              <a:t>public interface ConversationalAssistant {</a:t>
+            </a:r>
+            <a:endParaRPr lang="en-US" sz="1250" dirty="0"/>
+          </a:p>
+          <a:p>
+            <a:pPr algn="l" indent="0" marL="0">
+              <a:lnSpc>
+                <a:spcPct val="118000"/>
+              </a:lnSpc>
+              <a:buNone/>
+            </a:pPr>
+            <a:r>
+              <a:rPr lang="en-US" sz="1250" dirty="0">
+                <a:solidFill>
+                  <a:srgbClr val="CBD5E1"/>
+                </a:solidFill>
+                <a:latin typeface="Courier New" pitchFamily="34" charset="0"/>
+                <a:ea typeface="Courier New" pitchFamily="34" charset="-122"/>
+                <a:cs typeface="Courier New" pitchFamily="34" charset="-120"/>
+              </a:rPr>
+              <a:t>    String chat(</a:t>
+            </a:r>
+            <a:endParaRPr lang="en-US" sz="1250" dirty="0"/>
+          </a:p>
+          <a:p>
+            <a:pPr algn="l" indent="0" marL="0">
+              <a:lnSpc>
+                <a:spcPct val="118000"/>
+              </a:lnSpc>
+              <a:buNone/>
+            </a:pPr>
+            <a:r>
+              <a:rPr lang="en-US" sz="1250" dirty="0">
+                <a:solidFill>
+                  <a:srgbClr val="FF4D6A"/>
+                </a:solidFill>
+                <a:latin typeface="Courier New" pitchFamily="34" charset="0"/>
+                <a:ea typeface="Courier New" pitchFamily="34" charset="-122"/>
+                <a:cs typeface="Courier New" pitchFamily="34" charset="-120"/>
+              </a:rPr>
+              <a:t>        @MemoryId</a:t>
+            </a:r>
+            <a:pPr algn="l" indent="0" marL="0">
+              <a:lnSpc>
+                <a:spcPct val="118000"/>
+              </a:lnSpc>
+              <a:buNone/>
+            </a:pPr>
+            <a:r>
+              <a:rPr lang="en-US" sz="1250" dirty="0">
+                <a:solidFill>
+                  <a:srgbClr val="CBD5E1"/>
+                </a:solidFill>
+                <a:latin typeface="Courier New" pitchFamily="34" charset="0"/>
+                <a:ea typeface="Courier New" pitchFamily="34" charset="-122"/>
+                <a:cs typeface="Courier New" pitchFamily="34" charset="-120"/>
+              </a:rPr>
+              <a:t> String sessionId,</a:t>
+            </a:r>
+            <a:endParaRPr lang="en-US" sz="1250" dirty="0"/>
+          </a:p>
+          <a:p>
+            <a:pPr algn="l" indent="0" marL="0">
+              <a:lnSpc>
+                <a:spcPct val="118000"/>
+              </a:lnSpc>
+              <a:buNone/>
+            </a:pPr>
+            <a:r>
+              <a:rPr lang="en-US" sz="1250" dirty="0">
+                <a:solidFill>
+                  <a:srgbClr val="FBBF24"/>
+                </a:solidFill>
+                <a:latin typeface="Courier New" pitchFamily="34" charset="0"/>
+                <a:ea typeface="Courier New" pitchFamily="34" charset="-122"/>
+                <a:cs typeface="Courier New" pitchFamily="34" charset="-120"/>
+              </a:rPr>
+              <a:t>        @UserMessage</a:t>
+            </a:r>
+            <a:pPr algn="l" indent="0" marL="0">
+              <a:lnSpc>
+                <a:spcPct val="118000"/>
+              </a:lnSpc>
+              <a:buNone/>
+            </a:pPr>
+            <a:r>
+              <a:rPr lang="en-US" sz="1250" dirty="0">
+                <a:solidFill>
+                  <a:srgbClr val="CBD5E1"/>
+                </a:solidFill>
+                <a:latin typeface="Courier New" pitchFamily="34" charset="0"/>
+                <a:ea typeface="Courier New" pitchFamily="34" charset="-122"/>
+                <a:cs typeface="Courier New" pitchFamily="34" charset="-120"/>
+              </a:rPr>
+              <a:t> String message);</a:t>
+            </a:r>
+            <a:endParaRPr lang="en-US" sz="1250" dirty="0"/>
+          </a:p>
+          <a:p>
+            <a:pPr algn="l" indent="0" marL="0">
+              <a:lnSpc>
+                <a:spcPct val="118000"/>
+              </a:lnSpc>
+              <a:buNone/>
+            </a:pPr>
+            <a:r>
+              <a:rPr lang="en-US" sz="1250" dirty="0">
+                <a:solidFill>
+                  <a:srgbClr val="CBD5E1"/>
+                </a:solidFill>
+                <a:latin typeface="Courier New" pitchFamily="34" charset="0"/>
+                <a:ea typeface="Courier New" pitchFamily="34" charset="-122"/>
+                <a:cs typeface="Courier New" pitchFamily="34" charset="-120"/>
+              </a:rPr>
+              <a:t>}</a:t>
+            </a:r>
+            <a:endParaRPr lang="en-US" sz="1250" dirty="0"/>
+          </a:p>
+          <a:p>
+            <a:pPr algn="l" indent="0" marL="0">
+              <a:lnSpc>
+                <a:spcPct val="118000"/>
+              </a:lnSpc>
+              <a:buNone/>
+            </a:pPr>
+            <a:r>
+              <a:rPr lang="en-US" sz="1250" dirty="0">
+                <a:solidFill>
+                  <a:srgbClr val="CBD5E1"/>
+                </a:solidFill>
+                <a:latin typeface="Courier New" pitchFamily="34" charset="0"/>
+                <a:ea typeface="Courier New" pitchFamily="34" charset="-122"/>
+                <a:cs typeface="Courier New" pitchFamily="34" charset="-120"/>
+              </a:rPr>
+              <a:t> </a:t>
+            </a:r>
+            <a:endParaRPr lang="en-US" sz="1250" dirty="0"/>
+          </a:p>
+          <a:p>
+            <a:pPr algn="l" indent="0" marL="0">
+              <a:lnSpc>
+                <a:spcPct val="118000"/>
+              </a:lnSpc>
+              <a:buNone/>
+            </a:pPr>
+            <a:r>
+              <a:rPr lang="en-US" sz="1250" i="1" dirty="0">
+                <a:solidFill>
+                  <a:srgbClr val="8294AE"/>
+                </a:solidFill>
+                <a:latin typeface="Courier New" pitchFamily="34" charset="0"/>
+                <a:ea typeface="Courier New" pitchFamily="34" charset="-122"/>
+                <a:cs typeface="Courier New" pitchFamily="34" charset="-120"/>
+              </a:rPr>
+              <a:t>// the caller supplies the id in the body:</a:t>
+            </a:r>
+            <a:endParaRPr lang="en-US" sz="1250" dirty="0"/>
+          </a:p>
+          <a:p>
+            <a:pPr algn="l" indent="0" marL="0">
+              <a:lnSpc>
+                <a:spcPct val="118000"/>
+              </a:lnSpc>
+              <a:buNone/>
+            </a:pPr>
+            <a:r>
+              <a:rPr lang="en-US" sz="1250" dirty="0">
+                <a:solidFill>
+                  <a:srgbClr val="34D399"/>
+                </a:solidFill>
+                <a:latin typeface="Courier New" pitchFamily="34" charset="0"/>
+                <a:ea typeface="Courier New" pitchFamily="34" charset="-122"/>
+                <a:cs typeface="Courier New" pitchFamily="34" charset="-120"/>
+              </a:rPr>
+              <a:t>POST /chat/memory</a:t>
+            </a:r>
+            <a:endParaRPr lang="en-US" sz="1250" dirty="0"/>
+          </a:p>
+          <a:p>
+            <a:pPr algn="l" indent="0" marL="0">
+              <a:lnSpc>
+                <a:spcPct val="118000"/>
+              </a:lnSpc>
+              <a:buNone/>
+            </a:pPr>
+            <a:r>
+              <a:rPr lang="en-US" sz="1250" dirty="0">
+                <a:solidFill>
+                  <a:srgbClr val="34D399"/>
+                </a:solidFill>
+                <a:latin typeface="Courier New" pitchFamily="34" charset="0"/>
+                <a:ea typeface="Courier New" pitchFamily="34" charset="-122"/>
+                <a:cs typeface="Courier New" pitchFamily="34" charset="-120"/>
+              </a:rPr>
+              <a:t>{ "sessionId": "rolf", "message": "..." }</a:t>
+            </a:r>
+            <a:endParaRPr lang="en-US" sz="1250" dirty="0"/>
+          </a:p>
+        </p:txBody>
+      </p:sp>
+      <p:sp>
+        <p:nvSpPr>
+          <p:cNvPr id="12" name="Shape 10"/>
+          <p:cNvSpPr/>
+          <p:nvPr/>
+        </p:nvSpPr>
+        <p:spPr>
+          <a:xfrm>
+            <a:off x="7406640" y="2286000"/>
+            <a:ext cx="4144975" cy="2331720"/>
+          </a:xfrm>
+          <a:prstGeom prst="roundRect">
+            <a:avLst>
+              <a:gd name="adj" fmla="val 3529"/>
+            </a:avLst>
+          </a:prstGeom>
+          <a:solidFill>
+            <a:srgbClr val="1E293B"/>
+          </a:solidFill>
+          <a:ln w="12700">
+            <a:solidFill>
+              <a:srgbClr val="2B3A52"/>
+            </a:solidFill>
+            <a:prstDash val="solid"/>
+          </a:ln>
+          <a:effectLst>
+            <a:outerShdw sx="100000" sy="100000" kx="0" ky="0" algn="bl" rotWithShape="0" blurRad="114300" dist="38100" dir="5400000">
+              <a:srgbClr val="000000">
+                <a:alpha val="28000"/>
+              </a:srgbClr>
+            </a:outerShdw>
+          </a:effectLst>
+        </p:spPr>
+      </p:sp>
+      <p:sp>
+        <p:nvSpPr>
+          <p:cNvPr id="13" name="Shape 11"/>
+          <p:cNvSpPr/>
+          <p:nvPr/>
+        </p:nvSpPr>
+        <p:spPr>
+          <a:xfrm>
+            <a:off x="7680960" y="2514600"/>
+            <a:ext cx="640080" cy="640080"/>
+          </a:xfrm>
+          <a:prstGeom prst="ellipse">
+            <a:avLst/>
+          </a:prstGeom>
+          <a:solidFill>
+            <a:srgbClr val="243349"/>
+          </a:solidFill>
+          <a:ln w="12700">
+            <a:solidFill>
+              <a:srgbClr val="2B3A52"/>
+            </a:solidFill>
+            <a:prstDash val="solid"/>
+          </a:ln>
+        </p:spPr>
+      </p:sp>
+      <p:pic>
+        <p:nvPicPr>
+          <p:cNvPr id="14" name="Image 0" descr="preencoded.png">    </p:cNvPr>
+          <p:cNvPicPr>
+            <a:picLocks noChangeAspect="1"/>
+          </p:cNvPicPr>
+          <p:nvPr/>
+        </p:nvPicPr>
+        <p:blipFill>
+          <a:blip r:embed="rId1"/>
+          <a:stretch>
+            <a:fillRect/>
+          </a:stretch>
+        </p:blipFill>
+        <p:spPr>
+          <a:xfrm>
+            <a:off x="7860182" y="2693822"/>
+            <a:ext cx="281635" cy="281635"/>
+          </a:xfrm>
+          <a:prstGeom prst="rect">
+            <a:avLst/>
+          </a:prstGeom>
+        </p:spPr>
+      </p:pic>
+      <p:sp>
+        <p:nvSpPr>
+          <p:cNvPr id="15" name="Text 12"/>
+          <p:cNvSpPr/>
+          <p:nvPr/>
+        </p:nvSpPr>
+        <p:spPr>
+          <a:xfrm>
+            <a:off x="8458200" y="2542032"/>
+            <a:ext cx="2956255" cy="548640"/>
+          </a:xfrm>
+          <a:prstGeom prst="rect">
+            <a:avLst/>
+          </a:prstGeom>
+          <a:noFill/>
+          <a:ln/>
+        </p:spPr>
+        <p:txBody>
+          <a:bodyPr wrap="square" lIns="0" tIns="0" rIns="0" bIns="0" rtlCol="0" anchor="ctr"/>
+          <a:lstStyle/>
+          <a:p>
+            <a:pPr algn="l" indent="0" marL="0">
+              <a:buNone/>
+            </a:pPr>
+            <a:r>
+              <a:rPr lang="en-US" sz="1500" b="1" dirty="0">
+                <a:solidFill>
+                  <a:srgbClr val="34D399"/>
+                </a:solidFill>
+                <a:latin typeface="Arial" pitchFamily="34" charset="0"/>
+                <a:ea typeface="Arial" pitchFamily="34" charset="-122"/>
+                <a:cs typeface="Arial" pitchFamily="34" charset="-120"/>
+              </a:rPr>
+              <a:t>Same id → it remembers</a:t>
+            </a:r>
+            <a:endParaRPr lang="en-US" sz="1500" dirty="0"/>
+          </a:p>
+        </p:txBody>
+      </p:sp>
+      <p:sp>
+        <p:nvSpPr>
+          <p:cNvPr id="16" name="Text 13"/>
+          <p:cNvSpPr/>
+          <p:nvPr/>
+        </p:nvSpPr>
+        <p:spPr>
+          <a:xfrm>
+            <a:off x="7680960" y="3337560"/>
+            <a:ext cx="3596335" cy="1188720"/>
+          </a:xfrm>
+          <a:prstGeom prst="rect">
+            <a:avLst/>
+          </a:prstGeom>
+          <a:noFill/>
+          <a:ln/>
+        </p:spPr>
+        <p:txBody>
+          <a:bodyPr wrap="square" lIns="0" tIns="0" rIns="0" bIns="0" rtlCol="0" anchor="t"/>
+          <a:lstStyle/>
+          <a:p>
+            <a:pPr algn="l" indent="0" marL="0">
+              <a:lnSpc>
+                <a:spcPct val="120000"/>
+              </a:lnSpc>
+              <a:buNone/>
+            </a:pPr>
+            <a:r>
+              <a:rPr lang="en-US" sz="1350" dirty="0">
+                <a:solidFill>
+                  <a:srgbClr val="CBD5E1"/>
+                </a:solidFill>
+                <a:latin typeface="Calibri" pitchFamily="34" charset="0"/>
+                <a:ea typeface="Calibri" pitchFamily="34" charset="-122"/>
+                <a:cs typeface="Calibri" pitchFamily="34" charset="-120"/>
+              </a:rPr>
+              <a:t>“My name is Rolf.”</a:t>
+            </a:r>
+            <a:endParaRPr lang="en-US" sz="1350" dirty="0"/>
+          </a:p>
+          <a:p>
+            <a:pPr algn="l" indent="0" marL="0">
+              <a:lnSpc>
+                <a:spcPct val="120000"/>
+              </a:lnSpc>
+              <a:buNone/>
+            </a:pPr>
+            <a:r>
+              <a:rPr lang="en-US" sz="1350" dirty="0">
+                <a:solidFill>
+                  <a:srgbClr val="8294AE"/>
+                </a:solidFill>
+                <a:latin typeface="Calibri" pitchFamily="34" charset="0"/>
+                <a:ea typeface="Calibri" pitchFamily="34" charset="-122"/>
+                <a:cs typeface="Calibri" pitchFamily="34" charset="-120"/>
+              </a:rPr>
+              <a:t>“What's my name?”  </a:t>
+            </a:r>
+            <a:pPr algn="l" indent="0" marL="0">
+              <a:lnSpc>
+                <a:spcPct val="120000"/>
+              </a:lnSpc>
+              <a:buNone/>
+            </a:pPr>
+            <a:r>
+              <a:rPr lang="en-US" sz="1350" b="1" dirty="0">
+                <a:solidFill>
+                  <a:srgbClr val="34D399"/>
+                </a:solidFill>
+                <a:latin typeface="Calibri" pitchFamily="34" charset="0"/>
+                <a:ea typeface="Calibri" pitchFamily="34" charset="-122"/>
+                <a:cs typeface="Calibri" pitchFamily="34" charset="-120"/>
+              </a:rPr>
+              <a:t>→  “You're Rolf.”</a:t>
+            </a:r>
+            <a:endParaRPr lang="en-US" sz="1350" dirty="0"/>
+          </a:p>
+        </p:txBody>
+      </p:sp>
+      <p:sp>
+        <p:nvSpPr>
+          <p:cNvPr id="17" name="Shape 14"/>
+          <p:cNvSpPr/>
+          <p:nvPr/>
+        </p:nvSpPr>
+        <p:spPr>
+          <a:xfrm>
+            <a:off x="7406640" y="4800600"/>
+            <a:ext cx="4144975" cy="914400"/>
+          </a:xfrm>
+          <a:prstGeom prst="roundRect">
+            <a:avLst>
+              <a:gd name="adj" fmla="val 8000"/>
+            </a:avLst>
+          </a:prstGeom>
+          <a:solidFill>
+            <a:srgbClr val="16202F"/>
+          </a:solidFill>
+          <a:ln w="12700">
+            <a:solidFill>
+              <a:srgbClr val="2B3A52"/>
+            </a:solidFill>
+            <a:prstDash val="solid"/>
+          </a:ln>
+        </p:spPr>
+      </p:sp>
+      <p:sp>
+        <p:nvSpPr>
+          <p:cNvPr id="18" name="Text 15"/>
+          <p:cNvSpPr/>
+          <p:nvPr/>
+        </p:nvSpPr>
+        <p:spPr>
+          <a:xfrm>
+            <a:off x="7635240" y="4800600"/>
+            <a:ext cx="3687775" cy="914400"/>
+          </a:xfrm>
+          <a:prstGeom prst="rect">
+            <a:avLst/>
+          </a:prstGeom>
+          <a:noFill/>
+          <a:ln/>
+        </p:spPr>
+        <p:txBody>
+          <a:bodyPr wrap="square" lIns="0" tIns="0" rIns="0" bIns="0" rtlCol="0" anchor="ctr"/>
+          <a:lstStyle/>
+          <a:p>
+            <a:pPr algn="l" indent="0" marL="0">
+              <a:buNone/>
+            </a:pPr>
+            <a:r>
+              <a:rPr lang="en-US" sz="1250" b="1" dirty="0">
+                <a:solidFill>
+                  <a:srgbClr val="FF4D6A"/>
+                </a:solidFill>
+                <a:latin typeface="Calibri" pitchFamily="34" charset="0"/>
+                <a:ea typeface="Calibri" pitchFamily="34" charset="-122"/>
+                <a:cs typeface="Calibri" pitchFamily="34" charset="-120"/>
+              </a:rPr>
+              <a:t>A different sessionId starts blank. </a:t>
+            </a:r>
+            <a:pPr algn="l" indent="0" marL="0">
+              <a:buNone/>
+            </a:pPr>
+            <a:r>
+              <a:rPr lang="en-US" sz="1250" dirty="0">
+                <a:solidFill>
+                  <a:srgbClr val="CBD5E1"/>
+                </a:solidFill>
+                <a:latin typeface="Calibri" pitchFamily="34" charset="0"/>
+                <a:ea typeface="Calibri" pitchFamily="34" charset="-122"/>
+                <a:cs typeface="Calibri" pitchFamily="34" charset="-120"/>
+              </a:rPr>
+              <a:t>Default: last 10 messages, in-memory, per id — no store to wire up.</a:t>
+            </a:r>
+            <a:endParaRPr lang="en-US" sz="1250" dirty="0"/>
+          </a:p>
+        </p:txBody>
+      </p:sp>
+      <p:sp>
+        <p:nvSpPr>
+          <p:cNvPr id="20" name="Text 16"/>
+          <p:cNvSpPr/>
+          <p:nvPr/>
+        </p:nvSpPr>
+        <p:spPr>
+          <a:xfrm>
+            <a:off x="640080" y="6400800"/>
+            <a:ext cx="6400800" cy="274320"/>
+          </a:xfrm>
+          <a:prstGeom prst="rect">
+            <a:avLst/>
+          </a:prstGeom>
+          <a:noFill/>
+          <a:ln/>
+        </p:spPr>
+        <p:txBody>
+          <a:bodyPr wrap="square" lIns="0" tIns="0" rIns="0" bIns="0" rtlCol="0" anchor="ctr"/>
+          <a:lstStyle/>
+          <a:p>
+            <a:pPr algn="l" indent="0" marL="0">
+              <a:buNone/>
+            </a:pPr>
+            <a:r>
+              <a:rPr lang="en-US" sz="900" dirty="0">
+                <a:solidFill>
+                  <a:srgbClr val="8294AE"/>
+                </a:solidFill>
+                <a:latin typeface="Calibri" pitchFamily="34" charset="0"/>
+                <a:ea typeface="Calibri" pitchFamily="34" charset="-122"/>
+                <a:cs typeface="Calibri" pitchFamily="34" charset="-120"/>
+              </a:rPr>
+              <a:t>RAG, Four Ways</a:t>
+            </a:r>
+            <a:pPr algn="l" indent="0" marL="0">
+              <a:buNone/>
+            </a:pPr>
+            <a:r>
+              <a:rPr lang="en-US" sz="900" dirty="0">
+                <a:solidFill>
+                  <a:srgbClr val="2B3A52"/>
+                </a:solidFill>
+                <a:latin typeface="Calibri" pitchFamily="34" charset="0"/>
+                <a:ea typeface="Calibri" pitchFamily="34" charset="-122"/>
+                <a:cs typeface="Calibri" pitchFamily="34" charset="-120"/>
+              </a:rPr>
+              <a:t>   ·   Quarkus + LangChain4j</a:t>
+            </a:r>
+            <a:endParaRPr lang="en-US" sz="900" dirty="0"/>
+          </a:p>
+        </p:txBody>
+      </p:sp>
+      <p:sp>
+        <p:nvSpPr>
+          <p:cNvPr id="21" name="Text 17"/>
+          <p:cNvSpPr/>
+          <p:nvPr/>
+        </p:nvSpPr>
+        <p:spPr>
+          <a:xfrm>
+            <a:off x="10820095" y="6400800"/>
+            <a:ext cx="731520" cy="274320"/>
+          </a:xfrm>
+          <a:prstGeom prst="rect">
+            <a:avLst/>
+          </a:prstGeom>
+          <a:noFill/>
+          <a:ln/>
+        </p:spPr>
+        <p:txBody>
+          <a:bodyPr wrap="square" lIns="0" tIns="0" rIns="0" bIns="0" rtlCol="0" anchor="ctr"/>
+          <a:lstStyle/>
+          <a:p>
+            <a:pPr algn="r" indent="0" marL="0">
+              <a:buNone/>
+            </a:pPr>
+            <a:r>
+              <a:rPr lang="en-US" sz="900" dirty="0">
+                <a:solidFill>
+                  <a:srgbClr val="8294AE"/>
+                </a:solidFill>
+                <a:latin typeface="Courier New" pitchFamily="34" charset="0"/>
+                <a:ea typeface="Courier New" pitchFamily="34" charset="-122"/>
+                <a:cs typeface="Courier New" pitchFamily="34" charset="-120"/>
+              </a:rPr>
+              <a:t>17</a:t>
+            </a:r>
+            <a:endParaRPr lang="en-US" sz="900" dirty="0"/>
+          </a:p>
+        </p:txBody>
+      </p:sp>
+    </p:spTree>
+  </p:cSld>
+  <p:clrMapOvr>
+    <a:masterClrMapping/>
+  </p:clrMapOvr>
+</p:sld>
+</file>
+
+<file path=ppt/slides/slide18.xml><?xml version="1.0" encoding="utf-8"?>
+<p:sld xmlns:a="http://schemas.openxmlformats.org/drawingml/2006/main" xmlns:r="http://schemas.openxmlformats.org/officeDocument/2006/relationships" xmlns:p="http://schemas.openxmlformats.org/presentationml/2006/main">
+  <p:cSld name="Slide 18">
+    <p:bg>
+      <p:bgPr>
+        <a:solidFill>
+          <a:srgbClr val="0E1726"/>
+        </a:solidFill>
+      </p:bgPr>
+    </p:bg>
+    <p:spTree>
+      <p:nvGrpSpPr>
+        <p:cNvPr id="1" name=""/>
+        <p:cNvGrpSpPr/>
+        <p:nvPr/>
+      </p:nvGrpSpPr>
+      <p:grpSpPr>
+        <a:xfrm>
+          <a:off x="0" y="0"/>
+          <a:ext cx="0" cy="0"/>
+          <a:chOff x="0" y="0"/>
+          <a:chExt cx="0" cy="0"/>
+        </a:xfrm>
+      </p:grpSpPr>
+      <p:sp>
+        <p:nvSpPr>
+          <p:cNvPr id="2" name="Text 0"/>
+          <p:cNvSpPr/>
+          <p:nvPr/>
+        </p:nvSpPr>
+        <p:spPr>
+          <a:xfrm>
+            <a:off x="640080" y="475488"/>
+            <a:ext cx="4114800" cy="310896"/>
+          </a:xfrm>
+          <a:prstGeom prst="rect">
+            <a:avLst/>
+          </a:prstGeom>
+          <a:noFill/>
+          <a:ln/>
+        </p:spPr>
+        <p:txBody>
+          <a:bodyPr wrap="square" lIns="0" tIns="0" rIns="0" bIns="0" rtlCol="0" anchor="ctr"/>
+          <a:lstStyle/>
+          <a:p>
+            <a:pPr algn="l" indent="0" marL="0">
+              <a:buNone/>
+            </a:pPr>
+            <a:r>
+              <a:rPr lang="en-US" sz="1200" b="1" spc="200" kern="0" dirty="0">
+                <a:solidFill>
+                  <a:srgbClr val="FBBF24"/>
+                </a:solidFill>
+                <a:latin typeface="Courier New" pitchFamily="34" charset="0"/>
+                <a:ea typeface="Courier New" pitchFamily="34" charset="-122"/>
+                <a:cs typeface="Courier New" pitchFamily="34" charset="-120"/>
+              </a:rPr>
+              <a:t>// beyond rag · structured output</a:t>
+            </a:r>
+            <a:endParaRPr lang="en-US" sz="1200" dirty="0"/>
+          </a:p>
+        </p:txBody>
+      </p:sp>
+      <p:sp>
+        <p:nvSpPr>
+          <p:cNvPr id="3" name="Text 1"/>
+          <p:cNvSpPr/>
+          <p:nvPr/>
+        </p:nvSpPr>
+        <p:spPr>
+          <a:xfrm>
+            <a:off x="640080" y="768096"/>
+            <a:ext cx="9631375" cy="868680"/>
+          </a:xfrm>
+          <a:prstGeom prst="rect">
+            <a:avLst/>
+          </a:prstGeom>
+          <a:noFill/>
+          <a:ln/>
+        </p:spPr>
+        <p:txBody>
+          <a:bodyPr wrap="square" lIns="0" tIns="0" rIns="0" bIns="0" rtlCol="0" anchor="t"/>
+          <a:lstStyle/>
+          <a:p>
+            <a:pPr algn="l" indent="0" marL="0">
+              <a:buNone/>
+            </a:pPr>
+            <a:r>
+              <a:rPr lang="en-US" sz="3200" b="1" dirty="0">
+                <a:solidFill>
+                  <a:srgbClr val="FFFFFF"/>
+                </a:solidFill>
+                <a:latin typeface="Arial" pitchFamily="34" charset="0"/>
+                <a:ea typeface="Arial" pitchFamily="34" charset="-122"/>
+                <a:cs typeface="Arial" pitchFamily="34" charset="-120"/>
+              </a:rPr>
+              <a:t>Ask for a POJO, get a POJO</a:t>
+            </a:r>
+            <a:endParaRPr lang="en-US" sz="3200" dirty="0"/>
+          </a:p>
+        </p:txBody>
+      </p:sp>
+      <p:sp>
+        <p:nvSpPr>
+          <p:cNvPr id="4" name="Text 2"/>
+          <p:cNvSpPr/>
+          <p:nvPr/>
+        </p:nvSpPr>
+        <p:spPr>
+          <a:xfrm>
+            <a:off x="10454335" y="457200"/>
+            <a:ext cx="1097280" cy="822960"/>
+          </a:xfrm>
+          <a:prstGeom prst="rect">
+            <a:avLst/>
+          </a:prstGeom>
+          <a:noFill/>
+          <a:ln/>
+        </p:spPr>
+        <p:txBody>
+          <a:bodyPr wrap="square" lIns="0" tIns="0" rIns="0" bIns="0" rtlCol="0" anchor="t"/>
+          <a:lstStyle/>
+          <a:p>
+            <a:pPr algn="r" indent="0" marL="0">
+              <a:buNone/>
+            </a:pPr>
+            <a:r>
+              <a:rPr lang="en-US" sz="4000" b="1" dirty="0">
+                <a:solidFill>
+                  <a:srgbClr val="2B3A52"/>
+                </a:solidFill>
+                <a:latin typeface="Arial" pitchFamily="34" charset="0"/>
+                <a:ea typeface="Arial" pitchFamily="34" charset="-122"/>
+                <a:cs typeface="Arial" pitchFamily="34" charset="-120"/>
+              </a:rPr>
+              <a:t>18</a:t>
+            </a:r>
+            <a:endParaRPr lang="en-US" sz="4000" dirty="0"/>
+          </a:p>
+        </p:txBody>
+      </p:sp>
+      <p:sp>
+        <p:nvSpPr>
+          <p:cNvPr id="5" name="Text 3"/>
+          <p:cNvSpPr/>
+          <p:nvPr/>
+        </p:nvSpPr>
+        <p:spPr>
+          <a:xfrm>
+            <a:off x="640080" y="1591056"/>
+            <a:ext cx="10424160" cy="457200"/>
+          </a:xfrm>
+          <a:prstGeom prst="rect">
+            <a:avLst/>
+          </a:prstGeom>
+          <a:noFill/>
+          <a:ln/>
+        </p:spPr>
+        <p:txBody>
+          <a:bodyPr wrap="square" lIns="0" tIns="0" rIns="0" bIns="0" rtlCol="0" anchor="ctr"/>
+          <a:lstStyle/>
+          <a:p>
+            <a:pPr indent="0" marL="0">
+              <a:buNone/>
+            </a:pPr>
+            <a:r>
+              <a:rPr lang="en-US" sz="1500" i="1" dirty="0">
+                <a:solidFill>
+                  <a:srgbClr val="8294AE"/>
+                </a:solidFill>
+                <a:latin typeface="Calibri" pitchFamily="34" charset="0"/>
+                <a:ea typeface="Calibri" pitchFamily="34" charset="-122"/>
+                <a:cs typeface="Calibri" pitchFamily="34" charset="-120"/>
+              </a:rPr>
+              <a:t>Return a Java record from the AiService — the model answers as JSON, Quarkus maps it. No parsing.</a:t>
+            </a:r>
+            <a:endParaRPr lang="en-US" sz="1500" dirty="0"/>
+          </a:p>
+        </p:txBody>
+      </p:sp>
+      <p:sp>
+        <p:nvSpPr>
+          <p:cNvPr id="6" name="Shape 4"/>
+          <p:cNvSpPr/>
+          <p:nvPr/>
+        </p:nvSpPr>
+        <p:spPr>
+          <a:xfrm>
+            <a:off x="640080" y="2286000"/>
+            <a:ext cx="6492240" cy="3429000"/>
+          </a:xfrm>
+          <a:prstGeom prst="roundRect">
+            <a:avLst>
+              <a:gd name="adj" fmla="val 1600"/>
+            </a:avLst>
+          </a:prstGeom>
+          <a:solidFill>
+            <a:srgbClr val="0A111E"/>
+          </a:solidFill>
+          <a:ln w="12700">
+            <a:solidFill>
+              <a:srgbClr val="2B3A52"/>
+            </a:solidFill>
+            <a:prstDash val="solid"/>
+          </a:ln>
+          <a:effectLst>
+            <a:outerShdw sx="100000" sy="100000" kx="0" ky="0" algn="bl" rotWithShape="0" blurRad="114300" dist="38100" dir="5400000">
+              <a:srgbClr val="000000">
+                <a:alpha val="28000"/>
+              </a:srgbClr>
+            </a:outerShdw>
+          </a:effectLst>
+        </p:spPr>
+      </p:sp>
+      <p:sp>
+        <p:nvSpPr>
+          <p:cNvPr id="7" name="Shape 5"/>
+          <p:cNvSpPr/>
+          <p:nvPr/>
+        </p:nvSpPr>
+        <p:spPr>
+          <a:xfrm>
+            <a:off x="841248" y="2468880"/>
+            <a:ext cx="109728" cy="109728"/>
+          </a:xfrm>
+          <a:prstGeom prst="ellipse">
+            <a:avLst/>
+          </a:prstGeom>
+          <a:solidFill>
+            <a:srgbClr val="FF5F57"/>
+          </a:solidFill>
+          <a:ln/>
+        </p:spPr>
+      </p:sp>
+      <p:sp>
+        <p:nvSpPr>
+          <p:cNvPr id="8" name="Shape 6"/>
+          <p:cNvSpPr/>
+          <p:nvPr/>
+        </p:nvSpPr>
+        <p:spPr>
+          <a:xfrm>
+            <a:off x="1024128" y="2468880"/>
+            <a:ext cx="109728" cy="109728"/>
+          </a:xfrm>
+          <a:prstGeom prst="ellipse">
+            <a:avLst/>
+          </a:prstGeom>
+          <a:solidFill>
+            <a:srgbClr val="FEBC2E"/>
+          </a:solidFill>
+          <a:ln/>
+        </p:spPr>
+      </p:sp>
+      <p:sp>
+        <p:nvSpPr>
+          <p:cNvPr id="9" name="Shape 7"/>
+          <p:cNvSpPr/>
+          <p:nvPr/>
+        </p:nvSpPr>
+        <p:spPr>
+          <a:xfrm>
+            <a:off x="1207008" y="2468880"/>
+            <a:ext cx="109728" cy="109728"/>
+          </a:xfrm>
+          <a:prstGeom prst="ellipse">
+            <a:avLst/>
+          </a:prstGeom>
+          <a:solidFill>
+            <a:srgbClr val="28C840"/>
+          </a:solidFill>
+          <a:ln/>
+        </p:spPr>
+      </p:sp>
+      <p:sp>
+        <p:nvSpPr>
+          <p:cNvPr id="10" name="Text 8"/>
+          <p:cNvSpPr/>
+          <p:nvPr/>
+        </p:nvSpPr>
+        <p:spPr>
+          <a:xfrm>
+            <a:off x="1463040" y="2414016"/>
+            <a:ext cx="5486400" cy="237744"/>
+          </a:xfrm>
+          <a:prstGeom prst="rect">
+            <a:avLst/>
+          </a:prstGeom>
+          <a:noFill/>
+          <a:ln/>
+        </p:spPr>
+        <p:txBody>
+          <a:bodyPr wrap="square" lIns="0" tIns="0" rIns="0" bIns="0" rtlCol="0" anchor="ctr"/>
+          <a:lstStyle/>
+          <a:p>
+            <a:pPr algn="l" indent="0" marL="0">
+              <a:buNone/>
+            </a:pPr>
+            <a:r>
+              <a:rPr lang="en-US" sz="1050" dirty="0">
+                <a:solidFill>
+                  <a:srgbClr val="8294AE"/>
+                </a:solidFill>
+                <a:latin typeface="Courier New" pitchFamily="34" charset="0"/>
+                <a:ea typeface="Courier New" pitchFamily="34" charset="-122"/>
+                <a:cs typeface="Courier New" pitchFamily="34" charset="-120"/>
+              </a:rPr>
+              <a:t>GameExpert.java</a:t>
+            </a:r>
+            <a:endParaRPr lang="en-US" sz="1050" dirty="0"/>
+          </a:p>
+        </p:txBody>
+      </p:sp>
+      <p:sp>
+        <p:nvSpPr>
+          <p:cNvPr id="11" name="Text 9"/>
+          <p:cNvSpPr/>
+          <p:nvPr/>
+        </p:nvSpPr>
+        <p:spPr>
+          <a:xfrm>
+            <a:off x="896112" y="2743200"/>
+            <a:ext cx="6035040" cy="2788920"/>
+          </a:xfrm>
+          <a:prstGeom prst="rect">
+            <a:avLst/>
+          </a:prstGeom>
+          <a:noFill/>
+          <a:ln/>
+        </p:spPr>
+        <p:txBody>
+          <a:bodyPr wrap="square" lIns="0" tIns="0" rIns="0" bIns="0" rtlCol="0" anchor="t"/>
+          <a:lstStyle/>
+          <a:p>
+            <a:pPr algn="l" indent="0" marL="0">
+              <a:lnSpc>
+                <a:spcPct val="118000"/>
+              </a:lnSpc>
+              <a:buNone/>
+            </a:pPr>
+            <a:r>
+              <a:rPr lang="en-US" sz="1200" i="1" dirty="0">
+                <a:solidFill>
+                  <a:srgbClr val="8294AE"/>
+                </a:solidFill>
+                <a:latin typeface="Courier New" pitchFamily="34" charset="0"/>
+                <a:ea typeface="Courier New" pitchFamily="34" charset="-122"/>
+                <a:cs typeface="Courier New" pitchFamily="34" charset="-120"/>
+              </a:rPr>
+              <a:t>// a plain record describes the shape you want</a:t>
+            </a:r>
+            <a:endParaRPr lang="en-US" sz="1200" dirty="0"/>
+          </a:p>
+          <a:p>
+            <a:pPr algn="l" indent="0" marL="0">
+              <a:lnSpc>
+                <a:spcPct val="118000"/>
+              </a:lnSpc>
+              <a:buNone/>
+            </a:pPr>
+            <a:r>
+              <a:rPr lang="en-US" sz="1200" dirty="0">
+                <a:solidFill>
+                  <a:srgbClr val="FF4D6A"/>
+                </a:solidFill>
+                <a:latin typeface="Courier New" pitchFamily="34" charset="0"/>
+                <a:ea typeface="Courier New" pitchFamily="34" charset="-122"/>
+                <a:cs typeface="Courier New" pitchFamily="34" charset="-120"/>
+              </a:rPr>
+              <a:t>record </a:t>
+            </a:r>
+            <a:pPr algn="l" indent="0" marL="0">
+              <a:lnSpc>
+                <a:spcPct val="118000"/>
+              </a:lnSpc>
+              <a:buNone/>
+            </a:pPr>
+            <a:r>
+              <a:rPr lang="en-US" sz="1200" dirty="0">
+                <a:solidFill>
+                  <a:srgbClr val="CBD5E1"/>
+                </a:solidFill>
+                <a:latin typeface="Courier New" pitchFamily="34" charset="0"/>
+                <a:ea typeface="Courier New" pitchFamily="34" charset="-122"/>
+                <a:cs typeface="Courier New" pitchFamily="34" charset="-120"/>
+              </a:rPr>
+              <a:t>Game(String name, String publisher,</a:t>
+            </a:r>
+            <a:endParaRPr lang="en-US" sz="1200" dirty="0"/>
+          </a:p>
+          <a:p>
+            <a:pPr algn="l" indent="0" marL="0">
+              <a:lnSpc>
+                <a:spcPct val="118000"/>
+              </a:lnSpc>
+              <a:buNone/>
+            </a:pPr>
+            <a:r>
+              <a:rPr lang="en-US" sz="1200" dirty="0">
+                <a:solidFill>
+                  <a:srgbClr val="CBD5E1"/>
+                </a:solidFill>
+                <a:latin typeface="Courier New" pitchFamily="34" charset="0"/>
+                <a:ea typeface="Courier New" pitchFamily="34" charset="-122"/>
+                <a:cs typeface="Courier New" pitchFamily="34" charset="-120"/>
+              </a:rPr>
+              <a:t>            int metacriticScore, int releaseYear) {}</a:t>
+            </a:r>
+            <a:endParaRPr lang="en-US" sz="1200" dirty="0"/>
+          </a:p>
+          <a:p>
+            <a:pPr algn="l" indent="0" marL="0">
+              <a:lnSpc>
+                <a:spcPct val="118000"/>
+              </a:lnSpc>
+              <a:buNone/>
+            </a:pPr>
+            <a:r>
+              <a:rPr lang="en-US" sz="1200" dirty="0">
+                <a:solidFill>
+                  <a:srgbClr val="CBD5E1"/>
+                </a:solidFill>
+                <a:latin typeface="Courier New" pitchFamily="34" charset="0"/>
+                <a:ea typeface="Courier New" pitchFamily="34" charset="-122"/>
+                <a:cs typeface="Courier New" pitchFamily="34" charset="-120"/>
+              </a:rPr>
+              <a:t> </a:t>
+            </a:r>
+            <a:endParaRPr lang="en-US" sz="1200" dirty="0"/>
+          </a:p>
+          <a:p>
+            <a:pPr algn="l" indent="0" marL="0">
+              <a:lnSpc>
+                <a:spcPct val="118000"/>
+              </a:lnSpc>
+              <a:buNone/>
+            </a:pPr>
+            <a:r>
+              <a:rPr lang="en-US" sz="1200" dirty="0">
+                <a:solidFill>
+                  <a:srgbClr val="FBBF24"/>
+                </a:solidFill>
+                <a:latin typeface="Courier New" pitchFamily="34" charset="0"/>
+                <a:ea typeface="Courier New" pitchFamily="34" charset="-122"/>
+                <a:cs typeface="Courier New" pitchFamily="34" charset="-120"/>
+              </a:rPr>
+              <a:t>@RegisterAiService</a:t>
+            </a:r>
+            <a:endParaRPr lang="en-US" sz="1200" dirty="0"/>
+          </a:p>
+          <a:p>
+            <a:pPr algn="l" indent="0" marL="0">
+              <a:lnSpc>
+                <a:spcPct val="118000"/>
+              </a:lnSpc>
+              <a:buNone/>
+            </a:pPr>
+            <a:r>
+              <a:rPr lang="en-US" sz="1200" dirty="0">
+                <a:solidFill>
+                  <a:srgbClr val="CBD5E1"/>
+                </a:solidFill>
+                <a:latin typeface="Courier New" pitchFamily="34" charset="0"/>
+                <a:ea typeface="Courier New" pitchFamily="34" charset="-122"/>
+                <a:cs typeface="Courier New" pitchFamily="34" charset="-120"/>
+              </a:rPr>
+              <a:t>public interface GameExpert {</a:t>
+            </a:r>
+            <a:endParaRPr lang="en-US" sz="1200" dirty="0"/>
+          </a:p>
+          <a:p>
+            <a:pPr algn="l" indent="0" marL="0">
+              <a:lnSpc>
+                <a:spcPct val="118000"/>
+              </a:lnSpc>
+              <a:buNone/>
+            </a:pPr>
+            <a:r>
+              <a:rPr lang="en-US" sz="1200" dirty="0">
+                <a:solidFill>
+                  <a:srgbClr val="FBBF24"/>
+                </a:solidFill>
+                <a:latin typeface="Courier New" pitchFamily="34" charset="0"/>
+                <a:ea typeface="Courier New" pitchFamily="34" charset="-122"/>
+                <a:cs typeface="Courier New" pitchFamily="34" charset="-120"/>
+              </a:rPr>
+              <a:t>  @UserMessage("List the {count} best {genre}…")</a:t>
+            </a:r>
+            <a:endParaRPr lang="en-US" sz="1200" dirty="0"/>
+          </a:p>
+          <a:p>
+            <a:pPr algn="l" indent="0" marL="0">
+              <a:lnSpc>
+                <a:spcPct val="118000"/>
+              </a:lnSpc>
+              <a:buNone/>
+            </a:pPr>
+            <a:r>
+              <a:rPr lang="en-US" sz="1200" dirty="0">
+                <a:solidFill>
+                  <a:srgbClr val="CBD5E1"/>
+                </a:solidFill>
+                <a:latin typeface="Courier New" pitchFamily="34" charset="0"/>
+                <a:ea typeface="Courier New" pitchFamily="34" charset="-122"/>
+                <a:cs typeface="Courier New" pitchFamily="34" charset="-120"/>
+              </a:rPr>
+              <a:t>  GameChart bestGames(int count, String genre);</a:t>
+            </a:r>
+            <a:endParaRPr lang="en-US" sz="1200" dirty="0"/>
+          </a:p>
+          <a:p>
+            <a:pPr algn="l" indent="0" marL="0">
+              <a:lnSpc>
+                <a:spcPct val="118000"/>
+              </a:lnSpc>
+              <a:buNone/>
+            </a:pPr>
+            <a:r>
+              <a:rPr lang="en-US" sz="1200" i="1" dirty="0">
+                <a:solidFill>
+                  <a:srgbClr val="8294AE"/>
+                </a:solidFill>
+                <a:latin typeface="Courier New" pitchFamily="34" charset="0"/>
+                <a:ea typeface="Courier New" pitchFamily="34" charset="-122"/>
+                <a:cs typeface="Courier New" pitchFamily="34" charset="-120"/>
+              </a:rPr>
+              <a:t>  // ↑ returns a POJO, not a String</a:t>
+            </a:r>
+            <a:endParaRPr lang="en-US" sz="1200" dirty="0"/>
+          </a:p>
+          <a:p>
+            <a:pPr algn="l" indent="0" marL="0">
+              <a:lnSpc>
+                <a:spcPct val="118000"/>
+              </a:lnSpc>
+              <a:buNone/>
+            </a:pPr>
+            <a:r>
+              <a:rPr lang="en-US" sz="1200" dirty="0">
+                <a:solidFill>
+                  <a:srgbClr val="CBD5E1"/>
+                </a:solidFill>
+                <a:latin typeface="Courier New" pitchFamily="34" charset="0"/>
+                <a:ea typeface="Courier New" pitchFamily="34" charset="-122"/>
+                <a:cs typeface="Courier New" pitchFamily="34" charset="-120"/>
+              </a:rPr>
+              <a:t>}</a:t>
+            </a:r>
+            <a:endParaRPr lang="en-US" sz="1200" dirty="0"/>
+          </a:p>
+        </p:txBody>
+      </p:sp>
+      <p:sp>
+        <p:nvSpPr>
+          <p:cNvPr id="12" name="Shape 10"/>
+          <p:cNvSpPr/>
+          <p:nvPr/>
+        </p:nvSpPr>
+        <p:spPr>
+          <a:xfrm>
+            <a:off x="7498080" y="2286000"/>
+            <a:ext cx="4053535" cy="2697480"/>
+          </a:xfrm>
+          <a:prstGeom prst="roundRect">
+            <a:avLst>
+              <a:gd name="adj" fmla="val 2034"/>
+            </a:avLst>
+          </a:prstGeom>
+          <a:solidFill>
+            <a:srgbClr val="0A111E"/>
+          </a:solidFill>
+          <a:ln w="12700">
+            <a:solidFill>
+              <a:srgbClr val="2B3A52"/>
+            </a:solidFill>
+            <a:prstDash val="solid"/>
+          </a:ln>
+          <a:effectLst>
+            <a:outerShdw sx="100000" sy="100000" kx="0" ky="0" algn="bl" rotWithShape="0" blurRad="114300" dist="38100" dir="5400000">
+              <a:srgbClr val="000000">
+                <a:alpha val="28000"/>
+              </a:srgbClr>
+            </a:outerShdw>
+          </a:effectLst>
+        </p:spPr>
+      </p:sp>
+      <p:sp>
+        <p:nvSpPr>
+          <p:cNvPr id="13" name="Text 11"/>
+          <p:cNvSpPr/>
+          <p:nvPr/>
+        </p:nvSpPr>
+        <p:spPr>
+          <a:xfrm>
+            <a:off x="7726680" y="2395728"/>
+            <a:ext cx="3596335" cy="274320"/>
+          </a:xfrm>
+          <a:prstGeom prst="rect">
+            <a:avLst/>
+          </a:prstGeom>
+          <a:noFill/>
+          <a:ln/>
+        </p:spPr>
+        <p:txBody>
+          <a:bodyPr wrap="square" lIns="0" tIns="0" rIns="0" bIns="0" rtlCol="0" anchor="ctr"/>
+          <a:lstStyle/>
+          <a:p>
+            <a:pPr algn="l" indent="0" marL="0">
+              <a:buNone/>
+            </a:pPr>
+            <a:r>
+              <a:rPr lang="en-US" sz="1050" dirty="0">
+                <a:solidFill>
+                  <a:srgbClr val="8294AE"/>
+                </a:solidFill>
+                <a:latin typeface="Courier New" pitchFamily="34" charset="0"/>
+                <a:ea typeface="Courier New" pitchFamily="34" charset="-122"/>
+                <a:cs typeface="Courier New" pitchFamily="34" charset="-120"/>
+              </a:rPr>
+              <a:t>GameChart  (deserialized)</a:t>
+            </a:r>
+            <a:endParaRPr lang="en-US" sz="1050" dirty="0"/>
+          </a:p>
+        </p:txBody>
+      </p:sp>
+      <p:sp>
+        <p:nvSpPr>
+          <p:cNvPr id="14" name="Text 12"/>
+          <p:cNvSpPr/>
+          <p:nvPr/>
+        </p:nvSpPr>
+        <p:spPr>
+          <a:xfrm>
+            <a:off x="7754112" y="2724912"/>
+            <a:ext cx="3596335" cy="2194560"/>
+          </a:xfrm>
+          <a:prstGeom prst="rect">
+            <a:avLst/>
+          </a:prstGeom>
+          <a:noFill/>
+          <a:ln/>
+        </p:spPr>
+        <p:txBody>
+          <a:bodyPr wrap="square" lIns="0" tIns="0" rIns="0" bIns="0" rtlCol="0" anchor="t"/>
+          <a:lstStyle/>
+          <a:p>
+            <a:pPr algn="l" indent="0" marL="0">
+              <a:lnSpc>
+                <a:spcPct val="112000"/>
+              </a:lnSpc>
+              <a:buNone/>
+            </a:pPr>
+            <a:r>
+              <a:rPr lang="en-US" sz="1100" dirty="0">
+                <a:solidFill>
+                  <a:srgbClr val="CBD5E1"/>
+                </a:solidFill>
+                <a:latin typeface="Courier New" pitchFamily="34" charset="0"/>
+                <a:ea typeface="Courier New" pitchFamily="34" charset="-122"/>
+                <a:cs typeface="Courier New" pitchFamily="34" charset="-120"/>
+              </a:rPr>
+              <a:t>{</a:t>
+            </a:r>
+            <a:endParaRPr lang="en-US" sz="1100" dirty="0"/>
+          </a:p>
+          <a:p>
+            <a:pPr algn="l" indent="0" marL="0">
+              <a:lnSpc>
+                <a:spcPct val="112000"/>
+              </a:lnSpc>
+              <a:buNone/>
+            </a:pPr>
+            <a:r>
+              <a:rPr lang="en-US" sz="1100" dirty="0">
+                <a:solidFill>
+                  <a:srgbClr val="CBD5E1"/>
+                </a:solidFill>
+                <a:latin typeface="Courier New" pitchFamily="34" charset="0"/>
+                <a:ea typeface="Courier New" pitchFamily="34" charset="-122"/>
+                <a:cs typeface="Courier New" pitchFamily="34" charset="-120"/>
+              </a:rPr>
+              <a:t>  "genre": "open-world RPG",</a:t>
+            </a:r>
+            <a:endParaRPr lang="en-US" sz="1100" dirty="0"/>
+          </a:p>
+          <a:p>
+            <a:pPr algn="l" indent="0" marL="0">
+              <a:lnSpc>
+                <a:spcPct val="112000"/>
+              </a:lnSpc>
+              <a:buNone/>
+            </a:pPr>
+            <a:r>
+              <a:rPr lang="en-US" sz="1100" dirty="0">
+                <a:solidFill>
+                  <a:srgbClr val="CBD5E1"/>
+                </a:solidFill>
+                <a:latin typeface="Courier New" pitchFamily="34" charset="0"/>
+                <a:ea typeface="Courier New" pitchFamily="34" charset="-122"/>
+                <a:cs typeface="Courier New" pitchFamily="34" charset="-120"/>
+              </a:rPr>
+              <a:t>  "games": [</a:t>
+            </a:r>
+            <a:endParaRPr lang="en-US" sz="1100" dirty="0"/>
+          </a:p>
+          <a:p>
+            <a:pPr algn="l" indent="0" marL="0">
+              <a:lnSpc>
+                <a:spcPct val="112000"/>
+              </a:lnSpc>
+              <a:buNone/>
+            </a:pPr>
+            <a:r>
+              <a:rPr lang="en-US" sz="1100" dirty="0">
+                <a:solidFill>
+                  <a:srgbClr val="34D399"/>
+                </a:solidFill>
+                <a:latin typeface="Courier New" pitchFamily="34" charset="0"/>
+                <a:ea typeface="Courier New" pitchFamily="34" charset="-122"/>
+                <a:cs typeface="Courier New" pitchFamily="34" charset="-120"/>
+              </a:rPr>
+              <a:t>    { "name": "The Witcher 3",</a:t>
+            </a:r>
+            <a:endParaRPr lang="en-US" sz="1100" dirty="0"/>
+          </a:p>
+          <a:p>
+            <a:pPr algn="l" indent="0" marL="0">
+              <a:lnSpc>
+                <a:spcPct val="112000"/>
+              </a:lnSpc>
+              <a:buNone/>
+            </a:pPr>
+            <a:r>
+              <a:rPr lang="en-US" sz="1100" dirty="0">
+                <a:solidFill>
+                  <a:srgbClr val="34D399"/>
+                </a:solidFill>
+                <a:latin typeface="Courier New" pitchFamily="34" charset="0"/>
+                <a:ea typeface="Courier New" pitchFamily="34" charset="-122"/>
+                <a:cs typeface="Courier New" pitchFamily="34" charset="-120"/>
+              </a:rPr>
+              <a:t>      "publisher": "CD Projekt",</a:t>
+            </a:r>
+            <a:endParaRPr lang="en-US" sz="1100" dirty="0"/>
+          </a:p>
+          <a:p>
+            <a:pPr algn="l" indent="0" marL="0">
+              <a:lnSpc>
+                <a:spcPct val="112000"/>
+              </a:lnSpc>
+              <a:buNone/>
+            </a:pPr>
+            <a:r>
+              <a:rPr lang="en-US" sz="1100" dirty="0">
+                <a:solidFill>
+                  <a:srgbClr val="34D399"/>
+                </a:solidFill>
+                <a:latin typeface="Courier New" pitchFamily="34" charset="0"/>
+                <a:ea typeface="Courier New" pitchFamily="34" charset="-122"/>
+                <a:cs typeface="Courier New" pitchFamily="34" charset="-120"/>
+              </a:rPr>
+              <a:t>      "metacriticScore": 93,</a:t>
+            </a:r>
+            <a:endParaRPr lang="en-US" sz="1100" dirty="0"/>
+          </a:p>
+          <a:p>
+            <a:pPr algn="l" indent="0" marL="0">
+              <a:lnSpc>
+                <a:spcPct val="112000"/>
+              </a:lnSpc>
+              <a:buNone/>
+            </a:pPr>
+            <a:r>
+              <a:rPr lang="en-US" sz="1100" dirty="0">
+                <a:solidFill>
+                  <a:srgbClr val="34D399"/>
+                </a:solidFill>
+                <a:latin typeface="Courier New" pitchFamily="34" charset="0"/>
+                <a:ea typeface="Courier New" pitchFamily="34" charset="-122"/>
+                <a:cs typeface="Courier New" pitchFamily="34" charset="-120"/>
+              </a:rPr>
+              <a:t>      "releaseYear": 2015 },</a:t>
+            </a:r>
+            <a:endParaRPr lang="en-US" sz="1100" dirty="0"/>
+          </a:p>
+          <a:p>
+            <a:pPr algn="l" indent="0" marL="0">
+              <a:lnSpc>
+                <a:spcPct val="112000"/>
+              </a:lnSpc>
+              <a:buNone/>
+            </a:pPr>
+            <a:r>
+              <a:rPr lang="en-US" sz="1100" i="1" dirty="0">
+                <a:solidFill>
+                  <a:srgbClr val="8294AE"/>
+                </a:solidFill>
+                <a:latin typeface="Courier New" pitchFamily="34" charset="0"/>
+                <a:ea typeface="Courier New" pitchFamily="34" charset="-122"/>
+                <a:cs typeface="Courier New" pitchFamily="34" charset="-120"/>
+              </a:rPr>
+              <a:t>    ...two more...</a:t>
+            </a:r>
+            <a:endParaRPr lang="en-US" sz="1100" dirty="0"/>
+          </a:p>
+          <a:p>
+            <a:pPr algn="l" indent="0" marL="0">
+              <a:lnSpc>
+                <a:spcPct val="112000"/>
+              </a:lnSpc>
+              <a:buNone/>
+            </a:pPr>
+            <a:r>
+              <a:rPr lang="en-US" sz="1100" dirty="0">
+                <a:solidFill>
+                  <a:srgbClr val="CBD5E1"/>
+                </a:solidFill>
+                <a:latin typeface="Courier New" pitchFamily="34" charset="0"/>
+                <a:ea typeface="Courier New" pitchFamily="34" charset="-122"/>
+                <a:cs typeface="Courier New" pitchFamily="34" charset="-120"/>
+              </a:rPr>
+              <a:t>  ]</a:t>
+            </a:r>
+            <a:endParaRPr lang="en-US" sz="1100" dirty="0"/>
+          </a:p>
+          <a:p>
+            <a:pPr algn="l" indent="0" marL="0">
+              <a:lnSpc>
+                <a:spcPct val="112000"/>
+              </a:lnSpc>
+              <a:buNone/>
+            </a:pPr>
+            <a:r>
+              <a:rPr lang="en-US" sz="1100" dirty="0">
+                <a:solidFill>
+                  <a:srgbClr val="CBD5E1"/>
+                </a:solidFill>
+                <a:latin typeface="Courier New" pitchFamily="34" charset="0"/>
+                <a:ea typeface="Courier New" pitchFamily="34" charset="-122"/>
+                <a:cs typeface="Courier New" pitchFamily="34" charset="-120"/>
+              </a:rPr>
+              <a:t>}</a:t>
+            </a:r>
+            <a:endParaRPr lang="en-US" sz="1100" dirty="0"/>
+          </a:p>
+        </p:txBody>
+      </p:sp>
+      <p:sp>
+        <p:nvSpPr>
+          <p:cNvPr id="15" name="Text 13"/>
+          <p:cNvSpPr/>
+          <p:nvPr/>
+        </p:nvSpPr>
+        <p:spPr>
+          <a:xfrm>
+            <a:off x="7498080" y="5166360"/>
+            <a:ext cx="4053535" cy="1005840"/>
+          </a:xfrm>
+          <a:prstGeom prst="rect">
+            <a:avLst/>
+          </a:prstGeom>
+          <a:noFill/>
+          <a:ln/>
+        </p:spPr>
+        <p:txBody>
+          <a:bodyPr wrap="square" lIns="0" tIns="0" rIns="0" bIns="0" rtlCol="0" anchor="t"/>
+          <a:lstStyle/>
+          <a:p>
+            <a:pPr algn="l" marL="203200" indent="-203200">
+              <a:spcAft>
+                <a:spcPts val="600"/>
+              </a:spcAft>
+              <a:buSzPct val="100000"/>
+              <a:buChar char="•"/>
+            </a:pPr>
+            <a:r>
+              <a:rPr lang="en-US" sz="1250" dirty="0">
+                <a:solidFill>
+                  <a:srgbClr val="CBD5E1"/>
+                </a:solidFill>
+                <a:latin typeface="Calibri" pitchFamily="34" charset="0"/>
+                <a:ea typeface="Calibri" pitchFamily="34" charset="-122"/>
+                <a:cs typeface="Calibri" pitchFamily="34" charset="-120"/>
+              </a:rPr>
+              <a:t>Quarkus injects the JSON schema for you</a:t>
+            </a:r>
+            <a:endParaRPr lang="en-US" sz="1250" dirty="0"/>
+          </a:p>
+          <a:p>
+            <a:pPr algn="l" marL="203200" indent="-203200">
+              <a:spcAft>
+                <a:spcPts val="600"/>
+              </a:spcAft>
+              <a:buSzPct val="100000"/>
+              <a:buChar char="•"/>
+            </a:pPr>
+            <a:r>
+              <a:rPr lang="en-US" sz="1250" dirty="0">
+                <a:solidFill>
+                  <a:srgbClr val="CBD5E1"/>
+                </a:solidFill>
+                <a:latin typeface="Calibri" pitchFamily="34" charset="0"/>
+                <a:ea typeface="Calibri" pitchFamily="34" charset="-122"/>
+                <a:cs typeface="Calibri" pitchFamily="34" charset="-120"/>
+              </a:rPr>
+              <a:t>Reply is deserialized into the record</a:t>
+            </a:r>
+            <a:endParaRPr lang="en-US" sz="1250" dirty="0"/>
+          </a:p>
+          <a:p>
+            <a:pPr algn="l" marL="203200" indent="-203200">
+              <a:spcAft>
+                <a:spcPts val="600"/>
+              </a:spcAft>
+              <a:buSzPct val="100000"/>
+              <a:buChar char="•"/>
+            </a:pPr>
+            <a:r>
+              <a:rPr lang="en-US" sz="1250" dirty="0">
+                <a:solidFill>
+                  <a:srgbClr val="CBD5E1"/>
+                </a:solidFill>
+                <a:latin typeface="Calibri" pitchFamily="34" charset="0"/>
+                <a:ea typeface="Calibri" pitchFamily="34" charset="-122"/>
+                <a:cs typeface="Calibri" pitchFamily="34" charset="-120"/>
+              </a:rPr>
+              <a:t>No ObjectMapper, no 'find the JSON in the prose'</a:t>
+            </a:r>
+            <a:endParaRPr lang="en-US" sz="1250" dirty="0"/>
+          </a:p>
+        </p:txBody>
+      </p:sp>
+      <p:sp>
+        <p:nvSpPr>
+          <p:cNvPr id="17" name="Text 14"/>
+          <p:cNvSpPr/>
+          <p:nvPr/>
+        </p:nvSpPr>
+        <p:spPr>
+          <a:xfrm>
+            <a:off x="640080" y="6400800"/>
+            <a:ext cx="6400800" cy="274320"/>
+          </a:xfrm>
+          <a:prstGeom prst="rect">
+            <a:avLst/>
+          </a:prstGeom>
+          <a:noFill/>
+          <a:ln/>
+        </p:spPr>
+        <p:txBody>
+          <a:bodyPr wrap="square" lIns="0" tIns="0" rIns="0" bIns="0" rtlCol="0" anchor="ctr"/>
+          <a:lstStyle/>
+          <a:p>
+            <a:pPr algn="l" indent="0" marL="0">
+              <a:buNone/>
+            </a:pPr>
+            <a:r>
+              <a:rPr lang="en-US" sz="900" dirty="0">
+                <a:solidFill>
+                  <a:srgbClr val="8294AE"/>
+                </a:solidFill>
+                <a:latin typeface="Calibri" pitchFamily="34" charset="0"/>
+                <a:ea typeface="Calibri" pitchFamily="34" charset="-122"/>
+                <a:cs typeface="Calibri" pitchFamily="34" charset="-120"/>
+              </a:rPr>
+              <a:t>RAG, Four Ways</a:t>
+            </a:r>
+            <a:pPr algn="l" indent="0" marL="0">
+              <a:buNone/>
+            </a:pPr>
+            <a:r>
+              <a:rPr lang="en-US" sz="900" dirty="0">
+                <a:solidFill>
+                  <a:srgbClr val="2B3A52"/>
+                </a:solidFill>
+                <a:latin typeface="Calibri" pitchFamily="34" charset="0"/>
+                <a:ea typeface="Calibri" pitchFamily="34" charset="-122"/>
+                <a:cs typeface="Calibri" pitchFamily="34" charset="-120"/>
+              </a:rPr>
+              <a:t>   ·   Quarkus + LangChain4j</a:t>
+            </a:r>
+            <a:endParaRPr lang="en-US" sz="900" dirty="0"/>
+          </a:p>
+        </p:txBody>
+      </p:sp>
+      <p:sp>
+        <p:nvSpPr>
+          <p:cNvPr id="18" name="Text 15"/>
+          <p:cNvSpPr/>
+          <p:nvPr/>
+        </p:nvSpPr>
+        <p:spPr>
+          <a:xfrm>
+            <a:off x="10820095" y="6400800"/>
+            <a:ext cx="731520" cy="274320"/>
+          </a:xfrm>
+          <a:prstGeom prst="rect">
+            <a:avLst/>
+          </a:prstGeom>
+          <a:noFill/>
+          <a:ln/>
+        </p:spPr>
+        <p:txBody>
+          <a:bodyPr wrap="square" lIns="0" tIns="0" rIns="0" bIns="0" rtlCol="0" anchor="ctr"/>
+          <a:lstStyle/>
+          <a:p>
+            <a:pPr algn="r" indent="0" marL="0">
+              <a:buNone/>
+            </a:pPr>
+            <a:r>
+              <a:rPr lang="en-US" sz="900" dirty="0">
+                <a:solidFill>
+                  <a:srgbClr val="8294AE"/>
+                </a:solidFill>
+                <a:latin typeface="Courier New" pitchFamily="34" charset="0"/>
+                <a:ea typeface="Courier New" pitchFamily="34" charset="-122"/>
+                <a:cs typeface="Courier New" pitchFamily="34" charset="-120"/>
+              </a:rPr>
+              <a:t>18</a:t>
+            </a:r>
+            <a:endParaRPr lang="en-US" sz="900" dirty="0"/>
+          </a:p>
+        </p:txBody>
+      </p:sp>
+    </p:spTree>
+  </p:cSld>
+  <p:clrMapOvr>
+    <a:masterClrMapping/>
+  </p:clrMapOvr>
+</p:sld>
+</file>
+
+<file path=ppt/slides/slide19.xml><?xml version="1.0" encoding="utf-8"?>
+<p:sld xmlns:a="http://schemas.openxmlformats.org/drawingml/2006/main" xmlns:r="http://schemas.openxmlformats.org/officeDocument/2006/relationships" xmlns:p="http://schemas.openxmlformats.org/presentationml/2006/main">
+  <p:cSld name="Slide 19">
+    <p:bg>
+      <p:bgPr>
+        <a:solidFill>
+          <a:srgbClr val="0E1726"/>
+        </a:solidFill>
+      </p:bgPr>
+    </p:bg>
+    <p:spTree>
+      <p:nvGrpSpPr>
+        <p:cNvPr id="1" name=""/>
+        <p:cNvGrpSpPr/>
+        <p:nvPr/>
+      </p:nvGrpSpPr>
+      <p:grpSpPr>
+        <a:xfrm>
+          <a:off x="0" y="0"/>
+          <a:ext cx="0" cy="0"/>
+          <a:chOff x="0" y="0"/>
+          <a:chExt cx="0" cy="0"/>
+        </a:xfrm>
+      </p:grpSpPr>
+      <p:sp>
+        <p:nvSpPr>
+          <p:cNvPr id="2" name="Text 0"/>
+          <p:cNvSpPr/>
+          <p:nvPr/>
+        </p:nvSpPr>
+        <p:spPr>
+          <a:xfrm>
             <a:off x="9601200" y="-914400"/>
             <a:ext cx="3200400" cy="4572000"/>
           </a:xfrm>
@@ -10860,7 +13040,7 @@
                 <a:ea typeface="Courier New" pitchFamily="34" charset="-122"/>
                 <a:cs typeface="Courier New" pitchFamily="34" charset="-120"/>
               </a:rPr>
-              <a:t>17</a:t>
+              <a:t>19</a:t>
             </a:r>
             <a:endParaRPr lang="en-US" sz="900" dirty="0"/>
           </a:p>
